--- a/modulo-05/05.06 - Configurando Relatórios de Lista e Páginas de Objeto/05.06_Configurando_List_Report_e_Object_Page.pptx
+++ b/modulo-05/05.06 - Configurando Relatórios de Lista e Páginas de Objeto/05.06_Configurando_List_Report_e_Object_Page.pptx
@@ -1639,7 +1639,7 @@
                   <a:srgbClr val="8FA3C7"/>
                 </a:solidFill>
               </a:rPr>
-              <a:t>ABAP Moderno · Módulo 03 — SAP Fiori Elements com OData V4  ·  Aula 6 de 11 — List Report e Object Page</a:t>
+              <a:t>ABAP Moderno · Módulo 05 — SAP Fiori Elements com OData V4  ·  Aula 6 de 11 — List Report e Object Page</a:t>
             </a:r>
             <a:endParaRPr lang="en-US" sz="900" dirty="0"/>
           </a:p>
@@ -1785,7 +1785,7 @@
                   <a:srgbClr val="556B82"/>
                 </a:solidFill>
               </a:rPr>
-              <a:t>ABAP Moderno · Módulo 03 — SAP Fiori Elements com OData V4  ·  Aula 6 de 11 — List Report e Object Page</a:t>
+              <a:t>ABAP Moderno · Módulo 05 — SAP Fiori Elements com OData V4  ·  Aula 6 de 11 — List Report e Object Page</a:t>
             </a:r>
             <a:endParaRPr lang="en-US" sz="900" dirty="0"/>
           </a:p>
@@ -2216,7 +2216,7 @@
                   <a:srgbClr val="89D1FF"/>
                 </a:solidFill>
               </a:rPr>
-              <a:t>MÓDULO 03 · AULA 06 DE 11</a:t>
+              <a:t>MÓDULO 05 · AULA 06 DE 11</a:t>
             </a:r>
             <a:endParaRPr lang="en-US" sz="1400" dirty="0"/>
           </a:p>
@@ -2646,7 +2646,7 @@
                   <a:srgbClr val="8FA3C7"/>
                 </a:solidFill>
               </a:rPr>
-              <a:t>ABAP Moderno · Módulo 03 — SAP Fiori Elements com OData V4 · Design System SAP Horizon</a:t>
+              <a:t>ABAP Moderno · Módulo 05 — SAP Fiori Elements com OData V4 · Design System SAP Horizon</a:t>
             </a:r>
             <a:endParaRPr lang="en-US" sz="1100" dirty="0"/>
           </a:p>
@@ -3151,7 +3151,7 @@
                   <a:srgbClr val="1D2D3E"/>
                 </a:solidFill>
               </a:rPr>
-              <a:t>Ideal para separar preços, datas, administração</a:t>
+              <a:t>Ideal para separar cliente, finalização e cancelamento</a:t>
             </a:r>
             <a:endParaRPr lang="en-US" sz="1400" dirty="0"/>
           </a:p>
@@ -3355,7 +3355,7 @@
                   <a:srgbClr val="0064D9"/>
                 </a:solidFill>
               </a:rPr>
-              <a:t>OBJECT PAGE · EXERCÍCIO DO CURSO</a:t>
+              <a:t>OBJECT PAGE · NO PROJETO</a:t>
             </a:r>
             <a:endParaRPr lang="en-US" sz="1100" dirty="0"/>
           </a:p>
@@ -3393,7 +3393,7 @@
                   <a:srgbClr val="1D2D3E"/>
                 </a:solidFill>
               </a:rPr>
-              <a:t>Subseções Prices e Dates com field groups</a:t>
+              <a:t>Subseções Finalização e Cancelamento</a:t>
             </a:r>
             <a:endParaRPr lang="en-US" sz="2800" dirty="0"/>
           </a:p>
@@ -3457,7 +3457,7 @@
         <p:spPr>
           <a:xfrm>
             <a:off x="640080" y="1700784"/>
-            <a:ext cx="2852928" cy="292608"/>
+            <a:ext cx="2619756" cy="292608"/>
           </a:xfrm>
           <a:prstGeom prst="rect">
             <a:avLst/>
@@ -3477,7 +3477,7 @@
         <p:spPr>
           <a:xfrm>
             <a:off x="640080" y="1700784"/>
-            <a:ext cx="2852928" cy="27432"/>
+            <a:ext cx="2619756" cy="27432"/>
           </a:xfrm>
           <a:prstGeom prst="rect">
             <a:avLst/>
@@ -3497,7 +3497,7 @@
         <p:spPr>
           <a:xfrm>
             <a:off x="731520" y="1719072"/>
-            <a:ext cx="2670048" cy="274320"/>
+            <a:ext cx="2436876" cy="274320"/>
           </a:xfrm>
           <a:prstGeom prst="rect">
             <a:avLst/>
@@ -3518,7 +3518,7 @@
                   <a:srgbClr val="FFFFFF"/>
                 </a:solidFill>
               </a:rPr>
-              <a:t>zc_fe_travel_######.ddlx.asddlxs</a:t>
+              <a:t>zc_pc_pedido_app.ddlx.asddlxs</a:t>
             </a:r>
             <a:endParaRPr lang="en-US" sz="950" dirty="0"/>
           </a:p>
@@ -3554,7 +3554,7 @@
                   <a:srgbClr val="9DA5B4"/>
                 </a:solidFill>
               </a:rPr>
-              <a:t>ZFE_TRAVEL_###### › Metadata Extensions</a:t>
+              <a:t>ZC_PC_PEDIDO_APP (field groups reais, reunidos numa #COLLECTION)</a:t>
             </a:r>
             <a:endParaRPr lang="en-US" sz="850" dirty="0"/>
           </a:p>
@@ -4042,73 +4042,7 @@
                 <a:ea typeface="Courier New" pitchFamily="34" charset="-122"/>
                 <a:cs typeface="Courier New" pitchFamily="34" charset="-120"/>
               </a:rPr>
-              <a:t>ZC_FE_TRAVEL_</a:t>
-            </a:r>
-            <a:r>
-              <a:rPr lang="en-US" sz="850" dirty="0">
-                <a:solidFill>
-                  <a:srgbClr val="CCCCCC"/>
-                </a:solidFill>
-                <a:latin typeface="Courier New" pitchFamily="34" charset="0"/>
-                <a:ea typeface="Courier New" pitchFamily="34" charset="-122"/>
-                <a:cs typeface="Courier New" pitchFamily="34" charset="-120"/>
-              </a:rPr>
-              <a:t>#</a:t>
-            </a:r>
-            <a:r>
-              <a:rPr lang="en-US" sz="850" dirty="0">
-                <a:solidFill>
-                  <a:srgbClr val="CCCCCC"/>
-                </a:solidFill>
-                <a:latin typeface="Courier New" pitchFamily="34" charset="0"/>
-                <a:ea typeface="Courier New" pitchFamily="34" charset="-122"/>
-                <a:cs typeface="Courier New" pitchFamily="34" charset="-120"/>
-              </a:rPr>
-              <a:t>#</a:t>
-            </a:r>
-            <a:r>
-              <a:rPr lang="en-US" sz="850" dirty="0">
-                <a:solidFill>
-                  <a:srgbClr val="CCCCCC"/>
-                </a:solidFill>
-                <a:latin typeface="Courier New" pitchFamily="34" charset="0"/>
-                <a:ea typeface="Courier New" pitchFamily="34" charset="-122"/>
-                <a:cs typeface="Courier New" pitchFamily="34" charset="-120"/>
-              </a:rPr>
-              <a:t>#</a:t>
-            </a:r>
-            <a:r>
-              <a:rPr lang="en-US" sz="850" dirty="0">
-                <a:solidFill>
-                  <a:srgbClr val="CCCCCC"/>
-                </a:solidFill>
-                <a:latin typeface="Courier New" pitchFamily="34" charset="0"/>
-                <a:ea typeface="Courier New" pitchFamily="34" charset="-122"/>
-                <a:cs typeface="Courier New" pitchFamily="34" charset="-120"/>
-              </a:rPr>
-              <a:t>#</a:t>
-            </a:r>
-            <a:r>
-              <a:rPr lang="en-US" sz="850" dirty="0">
-                <a:solidFill>
-                  <a:srgbClr val="CCCCCC"/>
-                </a:solidFill>
-                <a:latin typeface="Courier New" pitchFamily="34" charset="0"/>
-                <a:ea typeface="Courier New" pitchFamily="34" charset="-122"/>
-                <a:cs typeface="Courier New" pitchFamily="34" charset="-120"/>
-              </a:rPr>
-              <a:t>#</a:t>
-            </a:r>
-            <a:r>
-              <a:rPr lang="en-US" sz="850" dirty="0">
-                <a:solidFill>
-                  <a:srgbClr val="CCCCCC"/>
-                </a:solidFill>
-                <a:latin typeface="Courier New" pitchFamily="34" charset="0"/>
-                <a:ea typeface="Courier New" pitchFamily="34" charset="-122"/>
-                <a:cs typeface="Courier New" pitchFamily="34" charset="-120"/>
-              </a:rPr>
-              <a:t>#</a:t>
+              <a:t>ZC_PC_PEDIDO_APP</a:t>
             </a:r>
             <a:r>
               <a:rPr lang="en-US" sz="850" dirty="0">
@@ -4324,7 +4258,7 @@
                 <a:ea typeface="Courier New" pitchFamily="34" charset="-122"/>
                 <a:cs typeface="Courier New" pitchFamily="34" charset="-120"/>
               </a:rPr>
-              <a:t>'GeneralInfo'</a:t>
+              <a:t>'DadosPedido'</a:t>
             </a:r>
             <a:r>
               <a:rPr lang="en-US" sz="850" dirty="0">
@@ -4467,7 +4401,7 @@
                 <a:ea typeface="Courier New" pitchFamily="34" charset="-122"/>
                 <a:cs typeface="Courier New" pitchFamily="34" charset="-120"/>
               </a:rPr>
-              <a:t>'General Information'</a:t>
+              <a:t>'Dados do Pedido'</a:t>
             </a:r>
             <a:r>
               <a:rPr lang="en-US" sz="850" dirty="0">
@@ -4533,7 +4467,7 @@
                 <a:ea typeface="Courier New" pitchFamily="34" charset="-122"/>
                 <a:cs typeface="Courier New" pitchFamily="34" charset="-120"/>
               </a:rPr>
-              <a:t>10</a:t>
+              <a:t>20</a:t>
             </a:r>
             <a:r>
               <a:rPr lang="en-US" sz="850" dirty="0">
@@ -4652,7 +4586,7 @@
                 <a:ea typeface="Courier New" pitchFamily="34" charset="-122"/>
                 <a:cs typeface="Courier New" pitchFamily="34" charset="-120"/>
               </a:rPr>
-              <a:t>'General'</a:t>
+              <a:t>'Pedido'</a:t>
             </a:r>
             <a:r>
               <a:rPr lang="en-US" sz="850" dirty="0">
@@ -4795,7 +4729,7 @@
                 <a:ea typeface="Courier New" pitchFamily="34" charset="-122"/>
                 <a:cs typeface="Courier New" pitchFamily="34" charset="-120"/>
               </a:rPr>
-              <a:t>'GeneralInfo'</a:t>
+              <a:t>'DadosPedido'</a:t>
             </a:r>
             <a:r>
               <a:rPr lang="en-US" sz="850" dirty="0">
@@ -4914,7 +4848,7 @@
                 <a:ea typeface="Courier New" pitchFamily="34" charset="-122"/>
                 <a:cs typeface="Courier New" pitchFamily="34" charset="-120"/>
               </a:rPr>
-              <a:t>'Prices'</a:t>
+              <a:t>'Finalização'</a:t>
             </a:r>
             <a:r>
               <a:rPr lang="en-US" sz="850" dirty="0">
@@ -5132,7 +5066,7 @@
                 <a:ea typeface="Courier New" pitchFamily="34" charset="-122"/>
                 <a:cs typeface="Courier New" pitchFamily="34" charset="-120"/>
               </a:rPr>
-              <a:t>'GeneralInfo'</a:t>
+              <a:t>'DadosPedido'</a:t>
             </a:r>
             <a:r>
               <a:rPr lang="en-US" sz="850" dirty="0">
@@ -5198,7 +5132,7 @@
                 <a:ea typeface="Courier New" pitchFamily="34" charset="-122"/>
                 <a:cs typeface="Courier New" pitchFamily="34" charset="-120"/>
               </a:rPr>
-              <a:t>'PricesGroup'</a:t>
+              <a:t>'Finalizacao'</a:t>
             </a:r>
             <a:r>
               <a:rPr lang="en-US" sz="850" dirty="0">
@@ -5317,7 +5251,7 @@
                 <a:ea typeface="Courier New" pitchFamily="34" charset="-122"/>
                 <a:cs typeface="Courier New" pitchFamily="34" charset="-120"/>
               </a:rPr>
-              <a:t>'Dates'</a:t>
+              <a:t>'Cancelamento'</a:t>
             </a:r>
             <a:r>
               <a:rPr lang="en-US" sz="850" dirty="0">
@@ -5535,7 +5469,7 @@
                 <a:ea typeface="Courier New" pitchFamily="34" charset="-122"/>
                 <a:cs typeface="Courier New" pitchFamily="34" charset="-120"/>
               </a:rPr>
-              <a:t>'GeneralInfo'</a:t>
+              <a:t>'DadosPedido'</a:t>
             </a:r>
             <a:r>
               <a:rPr lang="en-US" sz="850" dirty="0">
@@ -5601,7 +5535,7 @@
                 <a:ea typeface="Courier New" pitchFamily="34" charset="-122"/>
                 <a:cs typeface="Courier New" pitchFamily="34" charset="-120"/>
               </a:rPr>
-              <a:t>'DatesGroup'</a:t>
+              <a:t>'Cancelamento'</a:t>
             </a:r>
             <a:r>
               <a:rPr lang="en-US" sz="850" dirty="0">
@@ -5815,7 +5749,7 @@
                 <a:ea typeface="Courier New" pitchFamily="34" charset="-122"/>
                 <a:cs typeface="Courier New" pitchFamily="34" charset="-120"/>
               </a:rPr>
-              <a:t>'PricesGroup'</a:t>
+              <a:t>'Finalizacao'</a:t>
             </a:r>
             <a:r>
               <a:rPr lang="en-US" sz="850" dirty="0">
@@ -5934,7 +5868,7 @@
                 <a:ea typeface="Courier New" pitchFamily="34" charset="-122"/>
                 <a:cs typeface="Courier New" pitchFamily="34" charset="-120"/>
               </a:rPr>
-              <a:t>TotalPrice</a:t>
+              <a:t>DataFinalizacao</a:t>
             </a:r>
             <a:r>
               <a:rPr lang="en-US" sz="850" dirty="0">
@@ -6097,7 +6031,7 @@
                 <a:ea typeface="Courier New" pitchFamily="34" charset="-122"/>
                 <a:cs typeface="Courier New" pitchFamily="34" charset="-120"/>
               </a:rPr>
-              <a:t>'PricesGroup'</a:t>
+              <a:t>'Cancelamento'</a:t>
             </a:r>
             <a:r>
               <a:rPr lang="en-US" sz="850" dirty="0">
@@ -6163,7 +6097,7 @@
                 <a:ea typeface="Courier New" pitchFamily="34" charset="-122"/>
                 <a:cs typeface="Courier New" pitchFamily="34" charset="-120"/>
               </a:rPr>
-              <a:t>20</a:t>
+              <a:t>10</a:t>
             </a:r>
             <a:r>
               <a:rPr lang="en-US" sz="850" dirty="0">
@@ -6216,7 +6150,7 @@
                 <a:ea typeface="Courier New" pitchFamily="34" charset="-122"/>
                 <a:cs typeface="Courier New" pitchFamily="34" charset="-120"/>
               </a:rPr>
-              <a:t>BookingFee</a:t>
+              <a:t>MotivoCancelamento</a:t>
             </a:r>
             <a:r>
               <a:rPr lang="en-US" sz="850" dirty="0">
@@ -6379,7 +6313,7 @@
                 <a:ea typeface="Courier New" pitchFamily="34" charset="-122"/>
                 <a:cs typeface="Courier New" pitchFamily="34" charset="-120"/>
               </a:rPr>
-              <a:t>'DatesGroup'</a:t>
+              <a:t>'Cancelamento'</a:t>
             </a:r>
             <a:r>
               <a:rPr lang="en-US" sz="850" dirty="0">
@@ -6445,7 +6379,7 @@
                 <a:ea typeface="Courier New" pitchFamily="34" charset="-122"/>
                 <a:cs typeface="Courier New" pitchFamily="34" charset="-120"/>
               </a:rPr>
-              <a:t>10</a:t>
+              <a:t>20</a:t>
             </a:r>
             <a:r>
               <a:rPr lang="en-US" sz="850" dirty="0">
@@ -6498,7 +6432,7 @@
                 <a:ea typeface="Courier New" pitchFamily="34" charset="-122"/>
                 <a:cs typeface="Courier New" pitchFamily="34" charset="-120"/>
               </a:rPr>
-              <a:t>BeginDate</a:t>
+              <a:t>DataCancelamento</a:t>
             </a:r>
             <a:r>
               <a:rPr lang="en-US" sz="850" dirty="0">
@@ -6661,7 +6595,7 @@
                 <a:ea typeface="Courier New" pitchFamily="34" charset="-122"/>
                 <a:cs typeface="Courier New" pitchFamily="34" charset="-120"/>
               </a:rPr>
-              <a:t>'DatesGroup'</a:t>
+              <a:t>'Cancelamento'</a:t>
             </a:r>
             <a:r>
               <a:rPr lang="en-US" sz="850" dirty="0">
@@ -6727,7 +6661,7 @@
                 <a:ea typeface="Courier New" pitchFamily="34" charset="-122"/>
                 <a:cs typeface="Courier New" pitchFamily="34" charset="-120"/>
               </a:rPr>
-              <a:t>20</a:t>
+              <a:t>30</a:t>
             </a:r>
             <a:r>
               <a:rPr lang="en-US" sz="850" dirty="0">
@@ -6780,7 +6714,7 @@
                 <a:ea typeface="Courier New" pitchFamily="34" charset="-122"/>
                 <a:cs typeface="Courier New" pitchFamily="34" charset="-120"/>
               </a:rPr>
-              <a:t>EndDate</a:t>
+              <a:t>CanceladoPor</a:t>
             </a:r>
             <a:r>
               <a:rPr lang="en-US" sz="850" dirty="0">
@@ -7189,7 +7123,7 @@
                   <a:srgbClr val="556B82"/>
                 </a:solidFill>
               </a:rPr>
-              <a:t>General Information</a:t>
+              <a:t>Dados do Pedido</a:t>
             </a:r>
             <a:r>
               <a:rPr lang="en-US" sz="1050" dirty="0">
@@ -7292,7 +7226,7 @@
                   <a:srgbClr val="1D2D3E"/>
                 </a:solidFill>
               </a:rPr>
-              <a:t>Tabela de bookings</a:t>
+              <a:t>Tabela de itens</a:t>
             </a:r>
             <a:endParaRPr lang="en-US" sz="1400" dirty="0"/>
           </a:p>
@@ -7306,34 +7240,37 @@
                   <a:srgbClr val="556B82"/>
                 </a:solidFill>
               </a:rPr>
-              <a:t>Outra seção, criada no Page Editor como </a:t>
-            </a:r>
-            <a:r>
-              <a:rPr lang="en-US" sz="1050" i="1" dirty="0">
+              <a:t>Outra seção </a:t>
+            </a:r>
+            <a:r>
+              <a:rPr lang="en-US" sz="1050" dirty="0">
+                <a:solidFill>
+                  <a:srgbClr val="0064D9"/>
+                </a:solidFill>
+                <a:latin typeface="Courier New" pitchFamily="34" charset="0"/>
+                <a:ea typeface="Courier New" pitchFamily="34" charset="-122"/>
+                <a:cs typeface="Courier New" pitchFamily="34" charset="-120"/>
+              </a:rPr>
+              <a:t>#LINEITEM_REFERENCE</a:t>
+            </a:r>
+            <a:r>
+              <a:rPr lang="en-US" sz="1050" dirty="0">
                 <a:solidFill>
                   <a:srgbClr val="556B82"/>
                 </a:solidFill>
               </a:rPr>
-              <a:t>Table Section</a:t>
+              <a:t> sobre </a:t>
             </a:r>
             <a:r>
               <a:rPr lang="en-US" sz="1050" dirty="0">
                 <a:solidFill>
-                  <a:srgbClr val="556B82"/>
-                </a:solidFill>
-              </a:rPr>
-              <a:t> sobre </a:t>
-            </a:r>
-            <a:r>
-              <a:rPr lang="en-US" sz="1050" dirty="0">
-                <a:solidFill>
                   <a:srgbClr val="0064D9"/>
                 </a:solidFill>
                 <a:latin typeface="Courier New" pitchFamily="34" charset="0"/>
                 <a:ea typeface="Courier New" pitchFamily="34" charset="-122"/>
                 <a:cs typeface="Courier New" pitchFamily="34" charset="-120"/>
               </a:rPr>
-              <a:t>_Booking</a:t>
+              <a:t>_Itens</a:t>
             </a:r>
             <a:r>
               <a:rPr lang="en-US" sz="1050" dirty="0">
@@ -7483,7 +7420,7 @@
                   <a:srgbClr val="FFFFFF"/>
                 </a:solidFill>
               </a:rPr>
-              <a:t>O que aprendemos na aula 03.06</a:t>
+              <a:t>O que aprendemos na aula 05.06</a:t>
             </a:r>
             <a:endParaRPr lang="en-US" sz="3200" dirty="0"/>
           </a:p>
@@ -7977,7 +7914,7 @@
                   <a:srgbClr val="FFFFFF"/>
                 </a:solidFill>
               </a:rPr>
-              <a:t> com subseções e uma seção de tabela para os bookings</a:t>
+              <a:t> com subseções e uma seção de tabela para os itens do pedido</a:t>
             </a:r>
             <a:endParaRPr lang="en-US" sz="1400" dirty="0"/>
           </a:p>
@@ -8035,7 +7972,7 @@
                   <a:srgbClr val="89D1FF"/>
                 </a:solidFill>
               </a:rPr>
-              <a:t>Próxima aula · 03.07  </a:t>
+              <a:t>Próxima aula · 05.07  </a:t>
             </a:r>
             <a:r>
               <a:rPr lang="en-US" sz="1500" dirty="0">
@@ -8137,7 +8074,7 @@
         </p:blipFill>
         <p:spPr>
           <a:xfrm>
-            <a:off x="822960" y="3886200"/>
+            <a:off x="6355080" y="2926080"/>
             <a:ext cx="256032" cy="256032"/>
           </a:xfrm>
           <a:prstGeom prst="rect">
@@ -8161,7 +8098,7 @@
         </p:blipFill>
         <p:spPr>
           <a:xfrm>
-            <a:off x="6355080" y="2926080"/>
+            <a:off x="822960" y="3886200"/>
             <a:ext cx="256032" cy="256032"/>
           </a:xfrm>
           <a:prstGeom prst="rect">
@@ -8312,7 +8249,7 @@
                   <a:srgbClr val="1D2D3E"/>
                 </a:solidFill>
               </a:rPr>
-              <a:t>Módulo 03 em 11 aulas: Fiori Elements com OData V4</a:t>
+              <a:t>Módulo 05 em 11 aulas: Fiori Elements com OData V4</a:t>
             </a:r>
             <a:endParaRPr lang="en-US" sz="2800" dirty="0"/>
           </a:p>
@@ -10182,7 +10119,7 @@
                   <a:srgbClr val="1D2D3E"/>
                 </a:solidFill>
               </a:rPr>
-              <a:t>deixamos o Manage Travels com cara de produto: layout em colunas, carga inicial, ordenação, colunas ajustadas e seções organizadas.</a:t>
+              <a:t>deixamos o app Pedidos de Compras com cara de produto: layout em colunas, carga inicial, ordenação, colunas ajustadas e seções organizadas.</a:t>
             </a:r>
             <a:endParaRPr lang="en-US" sz="1400" dirty="0"/>
           </a:p>
@@ -10204,7 +10141,7 @@
         </p:blipFill>
         <p:spPr>
           <a:xfrm>
-            <a:off x="1696669" y="1847088"/>
+            <a:off x="5455768" y="1847088"/>
             <a:ext cx="347472" cy="347472"/>
           </a:xfrm>
           <a:prstGeom prst="rect">
@@ -10228,7 +10165,7 @@
         </p:blipFill>
         <p:spPr>
           <a:xfrm>
-            <a:off x="3576218" y="1847088"/>
+            <a:off x="1696669" y="1847088"/>
             <a:ext cx="347472" cy="347472"/>
           </a:xfrm>
           <a:prstGeom prst="rect">
@@ -10252,7 +10189,7 @@
         </p:blipFill>
         <p:spPr>
           <a:xfrm>
-            <a:off x="5455768" y="1847088"/>
+            <a:off x="3576218" y="1847088"/>
             <a:ext cx="347472" cy="347472"/>
           </a:xfrm>
           <a:prstGeom prst="rect">
@@ -10276,7 +10213,7 @@
         </p:blipFill>
         <p:spPr>
           <a:xfrm>
-            <a:off x="9214866" y="1847088"/>
+            <a:off x="7335317" y="1847088"/>
             <a:ext cx="347472" cy="347472"/>
           </a:xfrm>
           <a:prstGeom prst="rect">
@@ -10300,7 +10237,7 @@
         </p:blipFill>
         <p:spPr>
           <a:xfrm>
-            <a:off x="7335317" y="1847088"/>
+            <a:off x="1696669" y="3858768"/>
             <a:ext cx="347472" cy="347472"/>
           </a:xfrm>
           <a:prstGeom prst="rect">
@@ -10324,7 +10261,7 @@
         </p:blipFill>
         <p:spPr>
           <a:xfrm>
-            <a:off x="11094415" y="1847088"/>
+            <a:off x="9214866" y="1847088"/>
             <a:ext cx="347472" cy="347472"/>
           </a:xfrm>
           <a:prstGeom prst="rect">
@@ -10348,7 +10285,7 @@
         </p:blipFill>
         <p:spPr>
           <a:xfrm>
-            <a:off x="1696669" y="3858768"/>
+            <a:off x="11094415" y="1847088"/>
             <a:ext cx="347472" cy="347472"/>
           </a:xfrm>
           <a:prstGeom prst="rect">
@@ -10372,7 +10309,7 @@
         </p:blipFill>
         <p:spPr>
           <a:xfrm>
-            <a:off x="5455768" y="3858768"/>
+            <a:off x="3576218" y="3858768"/>
             <a:ext cx="347472" cy="347472"/>
           </a:xfrm>
           <a:prstGeom prst="rect">
@@ -10396,7 +10333,7 @@
         </p:blipFill>
         <p:spPr>
           <a:xfrm>
-            <a:off x="3576218" y="3858768"/>
+            <a:off x="5455768" y="3858768"/>
             <a:ext cx="347472" cy="347472"/>
           </a:xfrm>
           <a:prstGeom prst="rect">
@@ -10420,7 +10357,7 @@
         </p:blipFill>
         <p:spPr>
           <a:xfrm>
-            <a:off x="7335317" y="3858768"/>
+            <a:off x="9214866" y="3858768"/>
             <a:ext cx="347472" cy="347472"/>
           </a:xfrm>
           <a:prstGeom prst="rect">
@@ -10444,7 +10381,7 @@
         </p:blipFill>
         <p:spPr>
           <a:xfrm>
-            <a:off x="9214866" y="3858768"/>
+            <a:off x="7335317" y="3858768"/>
             <a:ext cx="347472" cy="347472"/>
           </a:xfrm>
           <a:prstGeom prst="rect">
@@ -11172,8 +11109,8 @@
         </p:blipFill>
         <p:spPr>
           <a:xfrm>
-            <a:off x="749808" y="4962049"/>
-            <a:ext cx="310896" cy="310896"/>
+            <a:off x="6562192" y="2792063"/>
+            <a:ext cx="256032" cy="256032"/>
           </a:xfrm>
           <a:prstGeom prst="rect">
             <a:avLst/>
@@ -11196,8 +11133,8 @@
         </p:blipFill>
         <p:spPr>
           <a:xfrm>
-            <a:off x="6562192" y="2792063"/>
-            <a:ext cx="256032" cy="256032"/>
+            <a:off x="749808" y="4962049"/>
+            <a:ext cx="310896" cy="310896"/>
           </a:xfrm>
           <a:prstGeom prst="rect">
             <a:avLst/>
@@ -11326,7 +11263,7 @@
                   <a:srgbClr val="89D1FF"/>
                 </a:solidFill>
               </a:rPr>
-              <a:t>AULA 03.06 · SEÇÃO 1</a:t>
+              <a:t>AULA 05.06 · SEÇÃO 1</a:t>
             </a:r>
             <a:endParaRPr lang="en-US" sz="1300" dirty="0"/>
           </a:p>
@@ -11981,7 +11918,7 @@
                   <a:srgbClr val="9DA5B4"/>
                 </a:solidFill>
               </a:rPr>
-              <a:t>travels › webapp</a:t>
+              <a:t>pedidos-compras › webapp (FCL ilustrativo)</a:t>
             </a:r>
             <a:endParaRPr lang="en-US" sz="850" dirty="0"/>
           </a:p>
@@ -12695,7 +12632,7 @@
                 <a:ea typeface="Courier New" pitchFamily="34" charset="-122"/>
                 <a:cs typeface="Courier New" pitchFamily="34" charset="-120"/>
               </a:rPr>
-              <a:t>"TravelList": {</a:t>
+              <a:t>"PedidoList": {</a:t>
             </a:r>
             <a:endParaRPr lang="en-US" sz="950" dirty="0"/>
           </a:p>
@@ -12788,7 +12725,7 @@
                 <a:ea typeface="Courier New" pitchFamily="34" charset="-122"/>
                 <a:cs typeface="Courier New" pitchFamily="34" charset="-120"/>
               </a:rPr>
-              <a:t>"contextPath": "/Travel",</a:t>
+              <a:t>"contextPath": "/Pedido",</a:t>
             </a:r>
             <a:endParaRPr lang="en-US" sz="950" dirty="0"/>
           </a:p>
@@ -13429,7 +13366,7 @@
                   <a:srgbClr val="1D2D3E"/>
                 </a:solidFill>
               </a:rPr>
-              <a:t>Via Page Map</a:t>
+              <a:t>No projeto</a:t>
             </a:r>
             <a:endParaRPr lang="en-US" sz="1400" dirty="0"/>
           </a:p>
@@ -13440,10 +13377,21 @@
             <a:r>
               <a:rPr lang="en-US" sz="1050" dirty="0">
                 <a:solidFill>
+                  <a:srgbClr val="0064D9"/>
+                </a:solidFill>
+                <a:latin typeface="Courier New" pitchFamily="34" charset="0"/>
+                <a:ea typeface="Courier New" pitchFamily="34" charset="-122"/>
+                <a:cs typeface="Courier New" pitchFamily="34" charset="-120"/>
+              </a:rPr>
+              <a:t>initialLoad</a:t>
+            </a:r>
+            <a:r>
+              <a:rPr lang="en-US" sz="1050" dirty="0">
+                <a:solidFill>
                   <a:srgbClr val="556B82"/>
                 </a:solidFill>
               </a:rPr>
-              <a:t>No curso, tudo isso é marcado no Page Map, que grava aqui.</a:t>
+              <a:t> está ativo; as páginas abrem em tela cheia, sem o FCL.</a:t>
             </a:r>
             <a:endParaRPr lang="en-US" sz="1400" dirty="0"/>
           </a:p>
@@ -13571,7 +13519,7 @@
                   <a:srgbClr val="89D1FF"/>
                 </a:solidFill>
               </a:rPr>
-              <a:t>AULA 03.06 · SEÇÃO 2</a:t>
+              <a:t>AULA 05.06 · SEÇÃO 2</a:t>
             </a:r>
             <a:endParaRPr lang="en-US" sz="1300" dirty="0"/>
           </a:p>
@@ -14129,7 +14077,7 @@
         <p:spPr>
           <a:xfrm>
             <a:off x="640080" y="1700784"/>
-            <a:ext cx="2852928" cy="292608"/>
+            <a:ext cx="2619756" cy="292608"/>
           </a:xfrm>
           <a:prstGeom prst="rect">
             <a:avLst/>
@@ -14149,7 +14097,7 @@
         <p:spPr>
           <a:xfrm>
             <a:off x="640080" y="1700784"/>
-            <a:ext cx="2852928" cy="27432"/>
+            <a:ext cx="2619756" cy="27432"/>
           </a:xfrm>
           <a:prstGeom prst="rect">
             <a:avLst/>
@@ -14169,7 +14117,7 @@
         <p:spPr>
           <a:xfrm>
             <a:off x="731520" y="1719072"/>
-            <a:ext cx="2670048" cy="274320"/>
+            <a:ext cx="2436876" cy="274320"/>
           </a:xfrm>
           <a:prstGeom prst="rect">
             <a:avLst/>
@@ -14190,7 +14138,7 @@
                   <a:srgbClr val="FFFFFF"/>
                 </a:solidFill>
               </a:rPr>
-              <a:t>zc_fe_travel_######.ddlx.asddlxs</a:t>
+              <a:t>zc_pc_pedido_app.ddlx.asddlxs</a:t>
             </a:r>
             <a:endParaRPr lang="en-US" sz="950" dirty="0"/>
           </a:p>
@@ -14226,7 +14174,7 @@
                   <a:srgbClr val="9DA5B4"/>
                 </a:solidFill>
               </a:rPr>
-              <a:t>ZFE_TRAVEL_###### › Metadata Extensions</a:t>
+              <a:t>ZAVBS_PC_PEDIDOS › ZC_PC_PEDIDO_APP (trecho)</a:t>
             </a:r>
             <a:endParaRPr lang="en-US" sz="850" dirty="0"/>
           </a:p>
@@ -14737,7 +14685,7 @@
                 <a:ea typeface="Courier New" pitchFamily="34" charset="-122"/>
                 <a:cs typeface="Courier New" pitchFamily="34" charset="-120"/>
               </a:rPr>
-              <a:t>'LastChangedAt'</a:t>
+              <a:t>'CreatedAt'</a:t>
             </a:r>
             <a:r>
               <a:rPr lang="en-US" sz="1050" dirty="0">
@@ -15127,73 +15075,7 @@
                 <a:ea typeface="Courier New" pitchFamily="34" charset="-122"/>
                 <a:cs typeface="Courier New" pitchFamily="34" charset="-120"/>
               </a:rPr>
-              <a:t>ZC_FE_TRAVEL_</a:t>
-            </a:r>
-            <a:r>
-              <a:rPr lang="en-US" sz="1050" dirty="0">
-                <a:solidFill>
-                  <a:srgbClr val="CCCCCC"/>
-                </a:solidFill>
-                <a:latin typeface="Courier New" pitchFamily="34" charset="0"/>
-                <a:ea typeface="Courier New" pitchFamily="34" charset="-122"/>
-                <a:cs typeface="Courier New" pitchFamily="34" charset="-120"/>
-              </a:rPr>
-              <a:t>#</a:t>
-            </a:r>
-            <a:r>
-              <a:rPr lang="en-US" sz="1050" dirty="0">
-                <a:solidFill>
-                  <a:srgbClr val="CCCCCC"/>
-                </a:solidFill>
-                <a:latin typeface="Courier New" pitchFamily="34" charset="0"/>
-                <a:ea typeface="Courier New" pitchFamily="34" charset="-122"/>
-                <a:cs typeface="Courier New" pitchFamily="34" charset="-120"/>
-              </a:rPr>
-              <a:t>#</a:t>
-            </a:r>
-            <a:r>
-              <a:rPr lang="en-US" sz="1050" dirty="0">
-                <a:solidFill>
-                  <a:srgbClr val="CCCCCC"/>
-                </a:solidFill>
-                <a:latin typeface="Courier New" pitchFamily="34" charset="0"/>
-                <a:ea typeface="Courier New" pitchFamily="34" charset="-122"/>
-                <a:cs typeface="Courier New" pitchFamily="34" charset="-120"/>
-              </a:rPr>
-              <a:t>#</a:t>
-            </a:r>
-            <a:r>
-              <a:rPr lang="en-US" sz="1050" dirty="0">
-                <a:solidFill>
-                  <a:srgbClr val="CCCCCC"/>
-                </a:solidFill>
-                <a:latin typeface="Courier New" pitchFamily="34" charset="0"/>
-                <a:ea typeface="Courier New" pitchFamily="34" charset="-122"/>
-                <a:cs typeface="Courier New" pitchFamily="34" charset="-120"/>
-              </a:rPr>
-              <a:t>#</a:t>
-            </a:r>
-            <a:r>
-              <a:rPr lang="en-US" sz="1050" dirty="0">
-                <a:solidFill>
-                  <a:srgbClr val="CCCCCC"/>
-                </a:solidFill>
-                <a:latin typeface="Courier New" pitchFamily="34" charset="0"/>
-                <a:ea typeface="Courier New" pitchFamily="34" charset="-122"/>
-                <a:cs typeface="Courier New" pitchFamily="34" charset="-120"/>
-              </a:rPr>
-              <a:t>#</a:t>
-            </a:r>
-            <a:r>
-              <a:rPr lang="en-US" sz="1050" dirty="0">
-                <a:solidFill>
-                  <a:srgbClr val="CCCCCC"/>
-                </a:solidFill>
-                <a:latin typeface="Courier New" pitchFamily="34" charset="0"/>
-                <a:ea typeface="Courier New" pitchFamily="34" charset="-122"/>
-                <a:cs typeface="Courier New" pitchFamily="34" charset="-120"/>
-              </a:rPr>
-              <a:t>#</a:t>
+              <a:t>ZC_PC_PEDIDO_APP</a:t>
             </a:r>
             <a:r>
               <a:rPr lang="en-US" sz="1050" dirty="0">
@@ -15431,6 +15313,72 @@
                 <a:ea typeface="Courier New" pitchFamily="34" charset="-122"/>
                 <a:cs typeface="Courier New" pitchFamily="34" charset="-120"/>
               </a:rPr>
+              <a:t>label</a:t>
+            </a:r>
+            <a:r>
+              <a:rPr lang="en-US" sz="1050" dirty="0">
+                <a:solidFill>
+                  <a:srgbClr val="CCCCCC"/>
+                </a:solidFill>
+                <a:latin typeface="Courier New" pitchFamily="34" charset="0"/>
+                <a:ea typeface="Courier New" pitchFamily="34" charset="-122"/>
+                <a:cs typeface="Courier New" pitchFamily="34" charset="-120"/>
+              </a:rPr>
+              <a:t>:</a:t>
+            </a:r>
+            <a:r>
+              <a:rPr lang="en-US" sz="1050" dirty="0">
+                <a:solidFill>
+                  <a:srgbClr val="CCCCCC"/>
+                </a:solidFill>
+                <a:latin typeface="Courier New" pitchFamily="34" charset="0"/>
+                <a:ea typeface="Courier New" pitchFamily="34" charset="-122"/>
+                <a:cs typeface="Courier New" pitchFamily="34" charset="-120"/>
+              </a:rPr>
+              <a:t> </a:t>
+            </a:r>
+            <a:r>
+              <a:rPr lang="en-US" sz="1050" dirty="0">
+                <a:solidFill>
+                  <a:srgbClr val="CE9178"/>
+                </a:solidFill>
+                <a:latin typeface="Courier New" pitchFamily="34" charset="0"/>
+                <a:ea typeface="Courier New" pitchFamily="34" charset="-122"/>
+                <a:cs typeface="Courier New" pitchFamily="34" charset="-120"/>
+              </a:rPr>
+              <a:t>'Pedido'</a:t>
+            </a:r>
+            <a:r>
+              <a:rPr lang="en-US" sz="1050" dirty="0">
+                <a:solidFill>
+                  <a:srgbClr val="CCCCCC"/>
+                </a:solidFill>
+                <a:latin typeface="Courier New" pitchFamily="34" charset="0"/>
+                <a:ea typeface="Courier New" pitchFamily="34" charset="-122"/>
+                <a:cs typeface="Courier New" pitchFamily="34" charset="-120"/>
+              </a:rPr>
+              <a:t>,</a:t>
+            </a:r>
+            <a:r>
+              <a:rPr lang="en-US" sz="1050" dirty="0">
+                <a:solidFill>
+                  <a:srgbClr val="CCCCCC"/>
+                </a:solidFill>
+                <a:latin typeface="Courier New" pitchFamily="34" charset="0"/>
+                <a:ea typeface="Courier New" pitchFamily="34" charset="-122"/>
+                <a:cs typeface="Courier New" pitchFamily="34" charset="-120"/>
+              </a:rPr>
+              <a:t> </a:t>
+            </a:r>
+            <a:r>
+              <a:rPr lang="en-US" sz="1050" dirty="0">
+                <a:solidFill>
+                  <a:srgbClr val="CCCCCC"/>
+                </a:solidFill>
+                <a:latin typeface="Courier New" pitchFamily="34" charset="0"/>
+                <a:ea typeface="Courier New" pitchFamily="34" charset="-122"/>
+                <a:cs typeface="Courier New" pitchFamily="34" charset="-120"/>
+              </a:rPr>
               <a:t>importance</a:t>
             </a:r>
             <a:r>
@@ -15539,7 +15487,7 @@
                 <a:ea typeface="Courier New" pitchFamily="34" charset="-122"/>
                 <a:cs typeface="Courier New" pitchFamily="34" charset="-120"/>
               </a:rPr>
-              <a:t>TravelID</a:t>
+              <a:t>NumeroPedido</a:t>
             </a:r>
             <a:r>
               <a:rPr lang="en-US" sz="1050" dirty="0">
@@ -15733,7 +15681,7 @@
                 <a:ea typeface="Courier New" pitchFamily="34" charset="-122"/>
                 <a:cs typeface="Courier New" pitchFamily="34" charset="-120"/>
               </a:rPr>
-              <a:t>15</a:t>
+              <a:t>30</a:t>
             </a:r>
             <a:r>
               <a:rPr lang="en-US" sz="1050" dirty="0">
@@ -15766,6 +15714,72 @@
                 <a:ea typeface="Courier New" pitchFamily="34" charset="-122"/>
                 <a:cs typeface="Courier New" pitchFamily="34" charset="-120"/>
               </a:rPr>
+              <a:t>label</a:t>
+            </a:r>
+            <a:r>
+              <a:rPr lang="en-US" sz="1050" dirty="0">
+                <a:solidFill>
+                  <a:srgbClr val="CCCCCC"/>
+                </a:solidFill>
+                <a:latin typeface="Courier New" pitchFamily="34" charset="0"/>
+                <a:ea typeface="Courier New" pitchFamily="34" charset="-122"/>
+                <a:cs typeface="Courier New" pitchFamily="34" charset="-120"/>
+              </a:rPr>
+              <a:t>:</a:t>
+            </a:r>
+            <a:r>
+              <a:rPr lang="en-US" sz="1050" dirty="0">
+                <a:solidFill>
+                  <a:srgbClr val="CCCCCC"/>
+                </a:solidFill>
+                <a:latin typeface="Courier New" pitchFamily="34" charset="0"/>
+                <a:ea typeface="Courier New" pitchFamily="34" charset="-122"/>
+                <a:cs typeface="Courier New" pitchFamily="34" charset="-120"/>
+              </a:rPr>
+              <a:t> </a:t>
+            </a:r>
+            <a:r>
+              <a:rPr lang="en-US" sz="1050" dirty="0">
+                <a:solidFill>
+                  <a:srgbClr val="CE9178"/>
+                </a:solidFill>
+                <a:latin typeface="Courier New" pitchFamily="34" charset="0"/>
+                <a:ea typeface="Courier New" pitchFamily="34" charset="-122"/>
+                <a:cs typeface="Courier New" pitchFamily="34" charset="-120"/>
+              </a:rPr>
+              <a:t>'Cliente'</a:t>
+            </a:r>
+            <a:r>
+              <a:rPr lang="en-US" sz="1050" dirty="0">
+                <a:solidFill>
+                  <a:srgbClr val="CCCCCC"/>
+                </a:solidFill>
+                <a:latin typeface="Courier New" pitchFamily="34" charset="0"/>
+                <a:ea typeface="Courier New" pitchFamily="34" charset="-122"/>
+                <a:cs typeface="Courier New" pitchFamily="34" charset="-120"/>
+              </a:rPr>
+              <a:t>,</a:t>
+            </a:r>
+            <a:r>
+              <a:rPr lang="en-US" sz="1050" dirty="0">
+                <a:solidFill>
+                  <a:srgbClr val="CCCCCC"/>
+                </a:solidFill>
+                <a:latin typeface="Courier New" pitchFamily="34" charset="0"/>
+                <a:ea typeface="Courier New" pitchFamily="34" charset="-122"/>
+                <a:cs typeface="Courier New" pitchFamily="34" charset="-120"/>
+              </a:rPr>
+              <a:t> </a:t>
+            </a:r>
+            <a:r>
+              <a:rPr lang="en-US" sz="1050" dirty="0">
+                <a:solidFill>
+                  <a:srgbClr val="CCCCCC"/>
+                </a:solidFill>
+                <a:latin typeface="Courier New" pitchFamily="34" charset="0"/>
+                <a:ea typeface="Courier New" pitchFamily="34" charset="-122"/>
+                <a:cs typeface="Courier New" pitchFamily="34" charset="-120"/>
+              </a:rPr>
               <a:t>importance</a:t>
             </a:r>
             <a:r>
@@ -15810,7 +15824,7 @@
                 <a:ea typeface="Courier New" pitchFamily="34" charset="-122"/>
                 <a:cs typeface="Courier New" pitchFamily="34" charset="-120"/>
               </a:rPr>
-              <a:t>MEDIUM</a:t>
+              <a:t>HIGH</a:t>
             </a:r>
             <a:r>
               <a:rPr lang="en-US" sz="1050" dirty="0">
@@ -15874,7 +15888,7 @@
                 <a:ea typeface="Courier New" pitchFamily="34" charset="-122"/>
                 <a:cs typeface="Courier New" pitchFamily="34" charset="-120"/>
               </a:rPr>
-              <a:t>Description</a:t>
+              <a:t>NomeCliente</a:t>
             </a:r>
             <a:r>
               <a:rPr lang="en-US" sz="1050" dirty="0">
@@ -16530,7 +16544,7 @@
                   <a:srgbClr val="0064D9"/>
                 </a:solidFill>
               </a:rPr>
-              <a:t>LIST REPORT · EXERCÍCIO DO CURSO</a:t>
+              <a:t>LIST REPORT · PARA PRATICAR</a:t>
             </a:r>
             <a:endParaRPr lang="en-US" sz="1100" dirty="0"/>
           </a:p>
@@ -16936,7 +16950,7 @@
                   <a:srgbClr val="556B82"/>
                 </a:solidFill>
               </a:rPr>
-              <a:t>Time Stamp</a:t>
+              <a:t>Data de finalização</a:t>
             </a:r>
             <a:r>
               <a:rPr lang="en-US" sz="1150" dirty="0">
@@ -17095,7 +17109,7 @@
                   <a:srgbClr val="556B82"/>
                 </a:solidFill>
               </a:rPr>
-              <a:t>Overall Status</a:t>
+              <a:t>Status do pedido</a:t>
             </a:r>
             <a:r>
               <a:rPr lang="en-US" sz="1150" dirty="0">
@@ -17111,7 +17125,7 @@
                   <a:srgbClr val="556B82"/>
                 </a:solidFill>
               </a:rPr>
-              <a:t>Booking Fee</a:t>
+              <a:t>CPF</a:t>
             </a:r>
             <a:r>
               <a:rPr lang="en-US" sz="1150" dirty="0">
@@ -17270,7 +17284,7 @@
                   <a:srgbClr val="556B82"/>
                 </a:solidFill>
               </a:rPr>
-              <a:t>Description</a:t>
+              <a:t>Observação</a:t>
             </a:r>
             <a:r>
               <a:rPr lang="en-US" sz="1150" dirty="0">
@@ -17286,7 +17300,7 @@
                   <a:srgbClr val="556B82"/>
                 </a:solidFill>
               </a:rPr>
-              <a:t>Travel ID</a:t>
+              <a:t>Pedido</a:t>
             </a:r>
             <a:r>
               <a:rPr lang="en-US" sz="1150" dirty="0">
@@ -17528,7 +17542,7 @@
                   <a:srgbClr val="89D1FF"/>
                 </a:solidFill>
               </a:rPr>
-              <a:t>AULA 03.06 · SEÇÃO 3</a:t>
+              <a:t>AULA 05.06 · SEÇÃO 3</a:t>
             </a:r>
             <a:endParaRPr lang="en-US" sz="1300" dirty="0"/>
           </a:p>
@@ -17608,7 +17622,7 @@
                   <a:srgbClr val="D1EFFF"/>
                 </a:solidFill>
               </a:rPr>
-              <a:t>General Information</a:t>
+              <a:t>Dados do Pedido</a:t>
             </a:r>
             <a:r>
               <a:rPr lang="en-US" sz="1600" dirty="0">
@@ -17624,7 +17638,7 @@
                   <a:srgbClr val="D1EFFF"/>
                 </a:solidFill>
               </a:rPr>
-              <a:t>General</a:t>
+              <a:t>Pedido</a:t>
             </a:r>
             <a:r>
               <a:rPr lang="en-US" sz="1600" dirty="0">
@@ -17640,7 +17654,7 @@
                   <a:srgbClr val="D1EFFF"/>
                 </a:solidFill>
               </a:rPr>
-              <a:t>Prices</a:t>
+              <a:t>Finalização</a:t>
             </a:r>
             <a:r>
               <a:rPr lang="en-US" sz="1600" dirty="0">
@@ -17656,7 +17670,7 @@
                   <a:srgbClr val="D1EFFF"/>
                 </a:solidFill>
               </a:rPr>
-              <a:t>Dates</a:t>
+              <a:t>Cancelamento</a:t>
             </a:r>
             <a:r>
               <a:rPr lang="en-US" sz="1600" dirty="0">
@@ -17672,7 +17686,7 @@
                   <a:srgbClr val="D1EFFF"/>
                 </a:solidFill>
               </a:rPr>
-              <a:t>Bookings</a:t>
+              <a:t>Itens</a:t>
             </a:r>
             <a:r>
               <a:rPr lang="en-US" sz="1600" dirty="0">
